--- a/ppt/patient-vitals-monitoring.pptx
+++ b/ppt/patient-vitals-monitoring.pptx
@@ -3095,64 +3095,58 @@
       <p:grpSpPr/>
       <p:sp>
         <p:nvSpPr>
-          <p:cNvPr id="2" name="Title 1"/>
-          <p:cNvSpPr>
-            <a:spLocks noGrp="1"/>
-          </p:cNvSpPr>
-          <p:nvPr>
-            <p:ph type="ctrTitle"/>
-          </p:nvPr>
+          <p:cNvPr id="2" name="Rectangle 1"/>
+          <p:cNvSpPr/>
+          <p:nvPr/>
         </p:nvSpPr>
         <p:spPr>
           <a:xfrm>
-            <a:off x="731520" y="2148840"/>
-            <a:ext cx="10698480" cy="1280160"/>
+            <a:off x="-91440" y="-91440"/>
+            <a:ext cx="12435840" cy="7132320"/>
           </a:xfrm>
+          <a:prstGeom prst="rect">
+            <a:avLst/>
+          </a:prstGeom>
+          <a:solidFill>
+            <a:srgbClr val="FFFFFF"/>
+          </a:solidFill>
+          <a:ln>
+            <a:noFill/>
+          </a:ln>
+          <a:effectLst/>
         </p:spPr>
-        <p:txBody>
-          <a:bodyPr wrap="square" anchor="t"/>
-          <a:lstStyle/>
-          <a:p>
-            <a:pPr algn="l"/>
-            <a:r>
-              <a:rPr b="1" sz="3200">
-                <a:solidFill>
-                  <a:srgbClr val="157A74"/>
-                </a:solidFill>
-                <a:latin typeface="Cambria"/>
-              </a:rPr>
-              <a:t>Patient Vitals Remote Monitoring</a:t>
-            </a:r>
-          </a:p>
-        </p:txBody>
-      </p:sp>
-      <p:sp>
-        <p:nvSpPr>
-          <p:cNvPr id="3" name="Subtitle 2"/>
-          <p:cNvSpPr>
-            <a:spLocks noGrp="1"/>
-          </p:cNvSpPr>
-          <p:nvPr>
-            <p:ph type="subTitle" idx="1"/>
-          </p:nvPr>
-        </p:nvSpPr>
-        <p:spPr/>
-        <p:txBody>
-          <a:bodyPr/>
-          <a:lstStyle/>
-          <a:p/>
-        </p:txBody>
-      </p:sp>
-      <p:sp>
-        <p:nvSpPr>
-          <p:cNvPr id="4" name="Rectangle 3"/>
+        <p:style>
+          <a:lnRef idx="1">
+            <a:schemeClr val="accent1"/>
+          </a:lnRef>
+          <a:fillRef idx="3">
+            <a:schemeClr val="accent1"/>
+          </a:fillRef>
+          <a:effectRef idx="2">
+            <a:schemeClr val="accent1"/>
+          </a:effectRef>
+          <a:fontRef idx="minor">
+            <a:schemeClr val="lt1"/>
+          </a:fontRef>
+        </p:style>
+        <p:txBody>
+          <a:bodyPr rtlCol="0" anchor="ctr"/>
+          <a:lstStyle/>
+          <a:p>
+            <a:pPr algn="ctr"/>
+          </a:p>
+        </p:txBody>
+      </p:sp>
+      <p:sp>
+        <p:nvSpPr>
+          <p:cNvPr id="3" name="Rectangle 2"/>
           <p:cNvSpPr/>
           <p:nvPr/>
         </p:nvSpPr>
         <p:spPr>
           <a:xfrm>
-            <a:off x="758952" y="3310128"/>
-            <a:ext cx="3657600" cy="41148"/>
+            <a:off x="-91440" y="-91440"/>
+            <a:ext cx="12435840" cy="4160520"/>
           </a:xfrm>
           <a:prstGeom prst="rect">
             <a:avLst/>
@@ -3189,14 +3183,58 @@
       </p:sp>
       <p:sp>
         <p:nvSpPr>
+          <p:cNvPr id="4" name="Oval 3"/>
+          <p:cNvSpPr/>
+          <p:nvPr/>
+        </p:nvSpPr>
+        <p:spPr>
+          <a:xfrm>
+            <a:off x="5570524" y="525780"/>
+            <a:ext cx="1051560" cy="1051560"/>
+          </a:xfrm>
+          <a:prstGeom prst="ellipse">
+            <a:avLst/>
+          </a:prstGeom>
+          <a:solidFill>
+            <a:srgbClr val="FFFFFF"/>
+          </a:solidFill>
+          <a:ln>
+            <a:noFill/>
+          </a:ln>
+          <a:effectLst/>
+        </p:spPr>
+        <p:style>
+          <a:lnRef idx="1">
+            <a:schemeClr val="accent1"/>
+          </a:lnRef>
+          <a:fillRef idx="3">
+            <a:schemeClr val="accent1"/>
+          </a:fillRef>
+          <a:effectRef idx="2">
+            <a:schemeClr val="accent1"/>
+          </a:effectRef>
+          <a:fontRef idx="minor">
+            <a:schemeClr val="lt1"/>
+          </a:fontRef>
+        </p:style>
+        <p:txBody>
+          <a:bodyPr rtlCol="0" anchor="ctr"/>
+          <a:lstStyle/>
+          <a:p>
+            <a:pPr algn="ctr"/>
+          </a:p>
+        </p:txBody>
+      </p:sp>
+      <p:sp>
+        <p:nvSpPr>
           <p:cNvPr id="5" name="TextBox 4"/>
           <p:cNvSpPr txBox="1"/>
           <p:nvPr/>
         </p:nvSpPr>
         <p:spPr>
           <a:xfrm>
-            <a:off x="758952" y="3520440"/>
-            <a:ext cx="10515600" cy="2194560"/>
+            <a:off x="5570524" y="525780"/>
+            <a:ext cx="1051560" cy="1051560"/>
           </a:xfrm>
           <a:prstGeom prst="rect">
             <a:avLst/>
@@ -3204,40 +3242,121 @@
           <a:noFill/>
         </p:spPr>
         <p:txBody>
+          <a:bodyPr wrap="none" anchor="ctr">
+            <a:spAutoFit/>
+          </a:bodyPr>
+          <a:lstStyle/>
+          <a:p>
+            <a:pPr algn="ctr"/>
+            <a:r>
+              <a:rPr sz="3400" b="1">
+                <a:solidFill>
+                  <a:srgbClr val="157A74"/>
+                </a:solidFill>
+                <a:latin typeface="Cambria"/>
+              </a:rPr>
+              <a:t>PV</a:t>
+            </a:r>
+          </a:p>
+        </p:txBody>
+      </p:sp>
+      <p:sp>
+        <p:nvSpPr>
+          <p:cNvPr id="6" name="TextBox 5"/>
+          <p:cNvSpPr txBox="1"/>
+          <p:nvPr/>
+        </p:nvSpPr>
+        <p:spPr>
+          <a:xfrm>
+            <a:off x="914400" y="1874519"/>
+            <a:ext cx="10332720" cy="1554480"/>
+          </a:xfrm>
+          <a:prstGeom prst="rect">
+            <a:avLst/>
+          </a:prstGeom>
+          <a:noFill/>
+        </p:spPr>
+        <p:txBody>
+          <a:bodyPr wrap="square" anchor="ctr">
+            <a:spAutoFit/>
+          </a:bodyPr>
+          <a:lstStyle/>
+          <a:p>
+            <a:pPr algn="ctr"/>
+            <a:r>
+              <a:rPr sz="3400" b="1" i="0">
+                <a:solidFill>
+                  <a:srgbClr val="FFFFFF"/>
+                </a:solidFill>
+                <a:latin typeface="Cambria"/>
+              </a:rPr>
+              <a:t>Patient Vitals Remote Monitoring</a:t>
+            </a:r>
+          </a:p>
+        </p:txBody>
+      </p:sp>
+      <p:sp>
+        <p:nvSpPr>
+          <p:cNvPr id="7" name="TextBox 6"/>
+          <p:cNvSpPr txBox="1"/>
+          <p:nvPr/>
+        </p:nvSpPr>
+        <p:spPr>
+          <a:xfrm>
+            <a:off x="1371600" y="4434840"/>
+            <a:ext cx="9418320" cy="548640"/>
+          </a:xfrm>
+          <a:prstGeom prst="rect">
+            <a:avLst/>
+          </a:prstGeom>
+          <a:noFill/>
+        </p:spPr>
+        <p:txBody>
           <a:bodyPr wrap="square" anchor="t">
             <a:spAutoFit/>
           </a:bodyPr>
           <a:lstStyle/>
           <a:p>
-            <a:pPr algn="l"/>
-            <a:r>
-              <a:rPr sz="1800" b="0">
-                <a:solidFill>
-                  <a:srgbClr val="5C655F"/>
+            <a:pPr algn="ctr"/>
+            <a:r>
+              <a:rPr sz="1800" b="0" i="1">
+                <a:solidFill>
+                  <a:srgbClr val="116762"/>
                 </a:solidFill>
                 <a:latin typeface="Georgia"/>
               </a:rPr>
               <a:t>Continuous ward monitoring on a fog and serverless pipeline</a:t>
             </a:r>
           </a:p>
-          <a:p>
-            <a:pPr algn="l"/>
-            <a:r>
-              <a:rPr sz="1600" b="1">
-                <a:solidFill>
-                  <a:srgbClr val="232A26"/>
-                </a:solidFill>
-                <a:latin typeface="Georgia"/>
-              </a:rPr>
-              <a:t/>
-            </a:r>
-          </a:p>
-          <a:p>
-            <a:pPr algn="l"/>
-            <a:r>
-              <a:rPr sz="1300" b="0">
-                <a:solidFill>
-                  <a:srgbClr val="5C655F"/>
+        </p:txBody>
+      </p:sp>
+      <p:sp>
+        <p:nvSpPr>
+          <p:cNvPr id="8" name="TextBox 7"/>
+          <p:cNvSpPr txBox="1"/>
+          <p:nvPr/>
+        </p:nvSpPr>
+        <p:spPr>
+          <a:xfrm>
+            <a:off x="1371600" y="5212080"/>
+            <a:ext cx="9418320" cy="1371600"/>
+          </a:xfrm>
+          <a:prstGeom prst="rect">
+            <a:avLst/>
+          </a:prstGeom>
+          <a:noFill/>
+        </p:spPr>
+        <p:txBody>
+          <a:bodyPr wrap="square" anchor="t">
+            <a:spAutoFit/>
+          </a:bodyPr>
+          <a:lstStyle/>
+          <a:p>
+            <a:pPr algn="ctr"/>
+            <a:r>
+              <a:rPr sz="1250" b="0" i="0">
+                <a:solidFill>
+                  <a:srgbClr val="5A635C"/>
                 </a:solidFill>
                 <a:latin typeface="Georgia"/>
               </a:rPr>
@@ -3245,11 +3364,11 @@
             </a:r>
           </a:p>
           <a:p>
-            <a:pPr algn="l"/>
-            <a:r>
-              <a:rPr sz="1300" b="0">
-                <a:solidFill>
-                  <a:srgbClr val="5C655F"/>
+            <a:pPr algn="ctr"/>
+            <a:r>
+              <a:rPr sz="1250" b="0" i="0">
+                <a:solidFill>
+                  <a:srgbClr val="5A635C"/>
                 </a:solidFill>
                 <a:latin typeface="Georgia"/>
               </a:rPr>

--- a/ppt/patient-vitals-monitoring.pptx
+++ b/ppt/patient-vitals-monitoring.pptx
@@ -3183,58 +3183,14 @@
       </p:sp>
       <p:sp>
         <p:nvSpPr>
-          <p:cNvPr id="4" name="Oval 3"/>
-          <p:cNvSpPr/>
+          <p:cNvPr id="4" name="TextBox 3"/>
+          <p:cNvSpPr txBox="1"/>
           <p:nvPr/>
         </p:nvSpPr>
         <p:spPr>
           <a:xfrm>
-            <a:off x="5570524" y="525780"/>
-            <a:ext cx="1051560" cy="1051560"/>
-          </a:xfrm>
-          <a:prstGeom prst="ellipse">
-            <a:avLst/>
-          </a:prstGeom>
-          <a:solidFill>
-            <a:srgbClr val="FFFFFF"/>
-          </a:solidFill>
-          <a:ln>
-            <a:noFill/>
-          </a:ln>
-          <a:effectLst/>
-        </p:spPr>
-        <p:style>
-          <a:lnRef idx="1">
-            <a:schemeClr val="accent1"/>
-          </a:lnRef>
-          <a:fillRef idx="3">
-            <a:schemeClr val="accent1"/>
-          </a:fillRef>
-          <a:effectRef idx="2">
-            <a:schemeClr val="accent1"/>
-          </a:effectRef>
-          <a:fontRef idx="minor">
-            <a:schemeClr val="lt1"/>
-          </a:fontRef>
-        </p:style>
-        <p:txBody>
-          <a:bodyPr rtlCol="0" anchor="ctr"/>
-          <a:lstStyle/>
-          <a:p>
-            <a:pPr algn="ctr"/>
-          </a:p>
-        </p:txBody>
-      </p:sp>
-      <p:sp>
-        <p:nvSpPr>
-          <p:cNvPr id="5" name="TextBox 4"/>
-          <p:cNvSpPr txBox="1"/>
-          <p:nvPr/>
-        </p:nvSpPr>
-        <p:spPr>
-          <a:xfrm>
-            <a:off x="5570524" y="525780"/>
-            <a:ext cx="1051560" cy="1051560"/>
+            <a:off x="914400" y="1143000"/>
+            <a:ext cx="10332720" cy="1965960"/>
           </a:xfrm>
           <a:prstGeom prst="rect">
             <a:avLst/>
@@ -3242,41 +3198,6 @@
           <a:noFill/>
         </p:spPr>
         <p:txBody>
-          <a:bodyPr wrap="none" anchor="ctr">
-            <a:spAutoFit/>
-          </a:bodyPr>
-          <a:lstStyle/>
-          <a:p>
-            <a:pPr algn="ctr"/>
-            <a:r>
-              <a:rPr sz="3400" b="1">
-                <a:solidFill>
-                  <a:srgbClr val="157A74"/>
-                </a:solidFill>
-                <a:latin typeface="Cambria"/>
-              </a:rPr>
-              <a:t>PV</a:t>
-            </a:r>
-          </a:p>
-        </p:txBody>
-      </p:sp>
-      <p:sp>
-        <p:nvSpPr>
-          <p:cNvPr id="6" name="TextBox 5"/>
-          <p:cNvSpPr txBox="1"/>
-          <p:nvPr/>
-        </p:nvSpPr>
-        <p:spPr>
-          <a:xfrm>
-            <a:off x="914400" y="1874519"/>
-            <a:ext cx="10332720" cy="1554480"/>
-          </a:xfrm>
-          <a:prstGeom prst="rect">
-            <a:avLst/>
-          </a:prstGeom>
-          <a:noFill/>
-        </p:spPr>
-        <p:txBody>
           <a:bodyPr wrap="square" anchor="ctr">
             <a:spAutoFit/>
           </a:bodyPr>
@@ -3297,7 +3218,7 @@
       </p:sp>
       <p:sp>
         <p:nvSpPr>
-          <p:cNvPr id="7" name="TextBox 6"/>
+          <p:cNvPr id="5" name="TextBox 4"/>
           <p:cNvSpPr txBox="1"/>
           <p:nvPr/>
         </p:nvSpPr>
@@ -3332,7 +3253,7 @@
       </p:sp>
       <p:sp>
         <p:nvSpPr>
-          <p:cNvPr id="8" name="TextBox 7"/>
+          <p:cNvPr id="6" name="TextBox 5"/>
           <p:cNvSpPr txBox="1"/>
           <p:nvPr/>
         </p:nvSpPr>

--- a/ppt/patient-vitals-monitoring.pptx
+++ b/ppt/patient-vitals-monitoring.pptx
@@ -3328,8 +3328,8 @@
         </p:nvSpPr>
         <p:spPr>
           <a:xfrm>
-            <a:off x="640080" y="384048"/>
-            <a:ext cx="10972800" cy="868680"/>
+            <a:off x="749808" y="621792"/>
+            <a:ext cx="10607040" cy="868680"/>
           </a:xfrm>
         </p:spPr>
         <p:txBody>
@@ -3361,8 +3361,8 @@
         </p:nvSpPr>
         <p:spPr>
           <a:xfrm>
-            <a:off x="658368" y="1481328"/>
-            <a:ext cx="10972800" cy="4846320"/>
+            <a:off x="768096" y="1691640"/>
+            <a:ext cx="10607040" cy="4617720"/>
           </a:xfrm>
         </p:spPr>
         <p:txBody>
@@ -3492,8 +3492,52 @@
         </p:nvSpPr>
         <p:spPr>
           <a:xfrm>
-            <a:off x="658368" y="1261872"/>
-            <a:ext cx="3108960" cy="36576"/>
+            <a:off x="365760" y="365760"/>
+            <a:ext cx="11457432" cy="6126480"/>
+          </a:xfrm>
+          <a:prstGeom prst="rect">
+            <a:avLst/>
+          </a:prstGeom>
+          <a:noFill/>
+          <a:ln w="25400">
+            <a:solidFill>
+              <a:srgbClr val="157A74"/>
+            </a:solidFill>
+          </a:ln>
+          <a:effectLst/>
+        </p:spPr>
+        <p:style>
+          <a:lnRef idx="1">
+            <a:schemeClr val="accent1"/>
+          </a:lnRef>
+          <a:fillRef idx="3">
+            <a:schemeClr val="accent1"/>
+          </a:fillRef>
+          <a:effectRef idx="2">
+            <a:schemeClr val="accent1"/>
+          </a:effectRef>
+          <a:fontRef idx="minor">
+            <a:schemeClr val="lt1"/>
+          </a:fontRef>
+        </p:style>
+        <p:txBody>
+          <a:bodyPr rtlCol="0" anchor="ctr"/>
+          <a:lstStyle/>
+          <a:p>
+            <a:pPr algn="ctr"/>
+          </a:p>
+        </p:txBody>
+      </p:sp>
+      <p:sp>
+        <p:nvSpPr>
+          <p:cNvPr id="5" name="Rectangle 4"/>
+          <p:cNvSpPr/>
+          <p:nvPr/>
+        </p:nvSpPr>
+        <p:spPr>
+          <a:xfrm>
+            <a:off x="768096" y="1481328"/>
+            <a:ext cx="2926080" cy="36576"/>
           </a:xfrm>
           <a:prstGeom prst="rect">
             <a:avLst/>
@@ -3558,8 +3602,8 @@
         </p:nvSpPr>
         <p:spPr>
           <a:xfrm>
-            <a:off x="640080" y="384048"/>
-            <a:ext cx="10972800" cy="868680"/>
+            <a:off x="749808" y="621792"/>
+            <a:ext cx="10607040" cy="868680"/>
           </a:xfrm>
         </p:spPr>
         <p:txBody>
@@ -3591,8 +3635,8 @@
         </p:nvSpPr>
         <p:spPr>
           <a:xfrm>
-            <a:off x="658368" y="1481328"/>
-            <a:ext cx="10972800" cy="4846320"/>
+            <a:off x="768096" y="1691640"/>
+            <a:ext cx="10607040" cy="4617720"/>
           </a:xfrm>
         </p:spPr>
         <p:txBody>
@@ -3722,8 +3766,52 @@
         </p:nvSpPr>
         <p:spPr>
           <a:xfrm>
-            <a:off x="658368" y="1261872"/>
-            <a:ext cx="3108960" cy="36576"/>
+            <a:off x="365760" y="365760"/>
+            <a:ext cx="11457432" cy="6126480"/>
+          </a:xfrm>
+          <a:prstGeom prst="rect">
+            <a:avLst/>
+          </a:prstGeom>
+          <a:noFill/>
+          <a:ln w="25400">
+            <a:solidFill>
+              <a:srgbClr val="157A74"/>
+            </a:solidFill>
+          </a:ln>
+          <a:effectLst/>
+        </p:spPr>
+        <p:style>
+          <a:lnRef idx="1">
+            <a:schemeClr val="accent1"/>
+          </a:lnRef>
+          <a:fillRef idx="3">
+            <a:schemeClr val="accent1"/>
+          </a:fillRef>
+          <a:effectRef idx="2">
+            <a:schemeClr val="accent1"/>
+          </a:effectRef>
+          <a:fontRef idx="minor">
+            <a:schemeClr val="lt1"/>
+          </a:fontRef>
+        </p:style>
+        <p:txBody>
+          <a:bodyPr rtlCol="0" anchor="ctr"/>
+          <a:lstStyle/>
+          <a:p>
+            <a:pPr algn="ctr"/>
+          </a:p>
+        </p:txBody>
+      </p:sp>
+      <p:sp>
+        <p:nvSpPr>
+          <p:cNvPr id="5" name="Rectangle 4"/>
+          <p:cNvSpPr/>
+          <p:nvPr/>
+        </p:nvSpPr>
+        <p:spPr>
+          <a:xfrm>
+            <a:off x="768096" y="1481328"/>
+            <a:ext cx="2926080" cy="36576"/>
           </a:xfrm>
           <a:prstGeom prst="rect">
             <a:avLst/>
@@ -3788,8 +3876,8 @@
         </p:nvSpPr>
         <p:spPr>
           <a:xfrm>
-            <a:off x="640080" y="384048"/>
-            <a:ext cx="10972800" cy="868680"/>
+            <a:off x="749808" y="621792"/>
+            <a:ext cx="10607040" cy="868680"/>
           </a:xfrm>
         </p:spPr>
         <p:txBody>
@@ -3821,8 +3909,8 @@
         </p:nvSpPr>
         <p:spPr>
           <a:xfrm>
-            <a:off x="658368" y="1481328"/>
-            <a:ext cx="5760720" cy="4754880"/>
+            <a:off x="768096" y="1691640"/>
+            <a:ext cx="5532120" cy="4526280"/>
           </a:xfrm>
         </p:spPr>
         <p:txBody>
@@ -3904,8 +3992,52 @@
         </p:nvSpPr>
         <p:spPr>
           <a:xfrm>
-            <a:off x="658368" y="1261872"/>
-            <a:ext cx="3108960" cy="36576"/>
+            <a:off x="365760" y="365760"/>
+            <a:ext cx="11457432" cy="6126480"/>
+          </a:xfrm>
+          <a:prstGeom prst="rect">
+            <a:avLst/>
+          </a:prstGeom>
+          <a:noFill/>
+          <a:ln w="25400">
+            <a:solidFill>
+              <a:srgbClr val="157A74"/>
+            </a:solidFill>
+          </a:ln>
+          <a:effectLst/>
+        </p:spPr>
+        <p:style>
+          <a:lnRef idx="1">
+            <a:schemeClr val="accent1"/>
+          </a:lnRef>
+          <a:fillRef idx="3">
+            <a:schemeClr val="accent1"/>
+          </a:fillRef>
+          <a:effectRef idx="2">
+            <a:schemeClr val="accent1"/>
+          </a:effectRef>
+          <a:fontRef idx="minor">
+            <a:schemeClr val="lt1"/>
+          </a:fontRef>
+        </p:style>
+        <p:txBody>
+          <a:bodyPr rtlCol="0" anchor="ctr"/>
+          <a:lstStyle/>
+          <a:p>
+            <a:pPr algn="ctr"/>
+          </a:p>
+        </p:txBody>
+      </p:sp>
+      <p:sp>
+        <p:nvSpPr>
+          <p:cNvPr id="5" name="Rectangle 4"/>
+          <p:cNvSpPr/>
+          <p:nvPr/>
+        </p:nvSpPr>
+        <p:spPr>
+          <a:xfrm>
+            <a:off x="768096" y="1481328"/>
+            <a:ext cx="2926080" cy="36576"/>
           </a:xfrm>
           <a:prstGeom prst="rect">
             <a:avLst/>
@@ -3942,7 +4074,7 @@
       </p:sp>
       <p:pic>
         <p:nvPicPr>
-          <p:cNvPr id="5" name="Picture 4" descr="dashboard-desktop.png"/>
+          <p:cNvPr id="6" name="Picture 5" descr="dashboard-desktop.png"/>
           <p:cNvPicPr>
             <a:picLocks noChangeAspect="1"/>
           </p:cNvPicPr>
@@ -3956,8 +4088,8 @@
         </p:blipFill>
         <p:spPr>
           <a:xfrm>
-            <a:off x="6629400" y="2003679"/>
-            <a:ext cx="5120640" cy="3600449"/>
+            <a:off x="6537960" y="2205275"/>
+            <a:ext cx="4846320" cy="3407568"/>
           </a:xfrm>
           <a:prstGeom prst="rect">
             <a:avLst/>
@@ -3994,8 +4126,8 @@
         </p:nvSpPr>
         <p:spPr>
           <a:xfrm>
-            <a:off x="640080" y="384048"/>
-            <a:ext cx="10972800" cy="868680"/>
+            <a:off x="749808" y="621792"/>
+            <a:ext cx="10607040" cy="868680"/>
           </a:xfrm>
         </p:spPr>
         <p:txBody>
@@ -4027,8 +4159,8 @@
         </p:nvSpPr>
         <p:spPr>
           <a:xfrm>
-            <a:off x="658368" y="1481328"/>
-            <a:ext cx="10972800" cy="4846320"/>
+            <a:off x="768096" y="1691640"/>
+            <a:ext cx="10607040" cy="4617720"/>
           </a:xfrm>
         </p:spPr>
         <p:txBody>
@@ -4190,8 +4322,52 @@
         </p:nvSpPr>
         <p:spPr>
           <a:xfrm>
-            <a:off x="658368" y="1261872"/>
-            <a:ext cx="3108960" cy="36576"/>
+            <a:off x="365760" y="365760"/>
+            <a:ext cx="11457432" cy="6126480"/>
+          </a:xfrm>
+          <a:prstGeom prst="rect">
+            <a:avLst/>
+          </a:prstGeom>
+          <a:noFill/>
+          <a:ln w="25400">
+            <a:solidFill>
+              <a:srgbClr val="157A74"/>
+            </a:solidFill>
+          </a:ln>
+          <a:effectLst/>
+        </p:spPr>
+        <p:style>
+          <a:lnRef idx="1">
+            <a:schemeClr val="accent1"/>
+          </a:lnRef>
+          <a:fillRef idx="3">
+            <a:schemeClr val="accent1"/>
+          </a:fillRef>
+          <a:effectRef idx="2">
+            <a:schemeClr val="accent1"/>
+          </a:effectRef>
+          <a:fontRef idx="minor">
+            <a:schemeClr val="lt1"/>
+          </a:fontRef>
+        </p:style>
+        <p:txBody>
+          <a:bodyPr rtlCol="0" anchor="ctr"/>
+          <a:lstStyle/>
+          <a:p>
+            <a:pPr algn="ctr"/>
+          </a:p>
+        </p:txBody>
+      </p:sp>
+      <p:sp>
+        <p:nvSpPr>
+          <p:cNvPr id="5" name="Rectangle 4"/>
+          <p:cNvSpPr/>
+          <p:nvPr/>
+        </p:nvSpPr>
+        <p:spPr>
+          <a:xfrm>
+            <a:off x="768096" y="1481328"/>
+            <a:ext cx="2926080" cy="36576"/>
           </a:xfrm>
           <a:prstGeom prst="rect">
             <a:avLst/>
@@ -4256,8 +4432,8 @@
         </p:nvSpPr>
         <p:spPr>
           <a:xfrm>
-            <a:off x="640080" y="384048"/>
-            <a:ext cx="10972800" cy="868680"/>
+            <a:off x="749808" y="621792"/>
+            <a:ext cx="10607040" cy="868680"/>
           </a:xfrm>
         </p:spPr>
         <p:txBody>
@@ -4289,8 +4465,8 @@
         </p:nvSpPr>
         <p:spPr>
           <a:xfrm>
-            <a:off x="658368" y="1481328"/>
-            <a:ext cx="10972800" cy="4846320"/>
+            <a:off x="768096" y="1691640"/>
+            <a:ext cx="10607040" cy="4617720"/>
           </a:xfrm>
         </p:spPr>
         <p:txBody>
@@ -4372,8 +4548,52 @@
         </p:nvSpPr>
         <p:spPr>
           <a:xfrm>
-            <a:off x="658368" y="1261872"/>
-            <a:ext cx="3108960" cy="36576"/>
+            <a:off x="365760" y="365760"/>
+            <a:ext cx="11457432" cy="6126480"/>
+          </a:xfrm>
+          <a:prstGeom prst="rect">
+            <a:avLst/>
+          </a:prstGeom>
+          <a:noFill/>
+          <a:ln w="25400">
+            <a:solidFill>
+              <a:srgbClr val="157A74"/>
+            </a:solidFill>
+          </a:ln>
+          <a:effectLst/>
+        </p:spPr>
+        <p:style>
+          <a:lnRef idx="1">
+            <a:schemeClr val="accent1"/>
+          </a:lnRef>
+          <a:fillRef idx="3">
+            <a:schemeClr val="accent1"/>
+          </a:fillRef>
+          <a:effectRef idx="2">
+            <a:schemeClr val="accent1"/>
+          </a:effectRef>
+          <a:fontRef idx="minor">
+            <a:schemeClr val="lt1"/>
+          </a:fontRef>
+        </p:style>
+        <p:txBody>
+          <a:bodyPr rtlCol="0" anchor="ctr"/>
+          <a:lstStyle/>
+          <a:p>
+            <a:pPr algn="ctr"/>
+          </a:p>
+        </p:txBody>
+      </p:sp>
+      <p:sp>
+        <p:nvSpPr>
+          <p:cNvPr id="5" name="Rectangle 4"/>
+          <p:cNvSpPr/>
+          <p:nvPr/>
+        </p:nvSpPr>
+        <p:spPr>
+          <a:xfrm>
+            <a:off x="768096" y="1481328"/>
+            <a:ext cx="2926080" cy="36576"/>
           </a:xfrm>
           <a:prstGeom prst="rect">
             <a:avLst/>
